--- a/Foundation_F4/Workshop/F4-W02_Apply_Workshop_L03-L04_At_the_School_Stationery_Shop.pptx
+++ b/Foundation_F4/Workshop/F4-W02_Apply_Workshop_L03-L04_At_the_School_Stationery_Shop.pptx
@@ -7132,6 +7132,19 @@
               <a:buNone/>
             </a:pPr>
             <a:r>
+              <a:rPr lang="en-US" sz="1100" dirty="0">
+                <a:solidFill>
+                  <a:srgbClr val="5A6472"/>
+                </a:solidFill>
+                <a:latin typeface="Calibri" pitchFamily="34" charset="0"/>
+                <a:cs typeface="Amiri" pitchFamily="2" charset="-78"/>
+              </a:rPr>
+              <a:t>‏</a:t>
+            </a:r>
+            <a:pPr algn="l" indent="0" marL="0">
+              <a:buNone/>
+            </a:pPr>
+            <a:r>
               <a:rPr lang="ar-SA" altLang="en-US" sz="1450" dirty="0">
                 <a:solidFill>
                   <a:srgbClr val="5A6472"/>
@@ -7153,7 +7166,7 @@
                 <a:latin typeface="Calibri" pitchFamily="34" charset="0"/>
                 <a:cs typeface="Amiri" pitchFamily="2" charset="-78"/>
               </a:rPr>
-              <a:t> (hold up an object)</a:t>
+              <a:t>‏ (hold up an object)</a:t>
             </a:r>
             <a:endParaRPr lang="en-US" sz="1100" dirty="0"/>
           </a:p>
@@ -7449,7 +7462,7 @@
                 <a:latin typeface="Calibri" pitchFamily="34" charset="0"/>
                 <a:cs typeface="Amiri" pitchFamily="2" charset="-78"/>
               </a:rPr>
-              <a:t>Odd numbers come from F4-L03, even numbers from F4-L04. Core: a full sentence from the starter. Develop: add the “more” part. Stretch: link two answers with </a:t>
+              <a:t>Odd numbers come from F4-L03, even numbers from F4-L04. Core: a full sentence from the starter. Develop: add the “more” part. Stretch: link two answers with ‏</a:t>
             </a:r>
             <a:pPr algn="l" indent="0" marL="0">
               <a:buNone/>
@@ -7476,7 +7489,7 @@
                 <a:latin typeface="Calibri" pitchFamily="34" charset="0"/>
                 <a:cs typeface="Amiri" pitchFamily="2" charset="-78"/>
               </a:rPr>
-              <a:t>, </a:t>
+              <a:t>‏, ‏</a:t>
             </a:r>
             <a:pPr algn="l" indent="0" marL="0">
               <a:buNone/>
@@ -7503,7 +7516,7 @@
                 <a:latin typeface="Calibri" pitchFamily="34" charset="0"/>
                 <a:cs typeface="Amiri" pitchFamily="2" charset="-78"/>
               </a:rPr>
-              <a:t> or </a:t>
+              <a:t>‏ or ‏</a:t>
             </a:r>
             <a:pPr algn="l" indent="0" marL="0">
               <a:buNone/>
@@ -7530,7 +7543,7 @@
                 <a:latin typeface="Calibri" pitchFamily="34" charset="0"/>
                 <a:cs typeface="Amiri" pitchFamily="2" charset="-78"/>
               </a:rPr>
-              <a:t>. Swap after each question.</a:t>
+              <a:t>‏. Swap after each question.</a:t>
             </a:r>
             <a:endParaRPr lang="en-US" sz="1100" dirty="0"/>
           </a:p>
@@ -9042,7 +9055,7 @@
                 <a:latin typeface="Calibri" pitchFamily="34" charset="0"/>
                 <a:cs typeface="Amiri" pitchFamily="2" charset="-78"/>
               </a:rPr>
-              <a:t>Give an opinion with </a:t>
+              <a:t>Give an opinion with ‏</a:t>
             </a:r>
             <a:pPr algn="l" indent="0" marL="0">
               <a:buNone/>
@@ -9069,7 +9082,7 @@
                 <a:latin typeface="Calibri" pitchFamily="34" charset="0"/>
                 <a:cs typeface="Amiri" pitchFamily="2" charset="-78"/>
               </a:rPr>
-              <a:t>.</a:t>
+              <a:t>‏.</a:t>
             </a:r>
             <a:endParaRPr lang="en-US" sz="1100" dirty="0"/>
           </a:p>
@@ -10880,7 +10893,7 @@
                 <a:latin typeface="Calibri" pitchFamily="34" charset="0"/>
                 <a:cs typeface="Amiri" pitchFamily="2" charset="-78"/>
               </a:rPr>
-              <a:t>Add a dual (</a:t>
+              <a:t>Add a dual (‏</a:t>
             </a:r>
             <a:pPr algn="l" indent="0" marL="0">
               <a:buNone/>
@@ -10934,7 +10947,7 @@
                 <a:latin typeface="Calibri" pitchFamily="34" charset="0"/>
                 <a:cs typeface="Amiri" pitchFamily="2" charset="-78"/>
               </a:rPr>
-              <a:t>) and </a:t>
+              <a:t>‏) and ‏</a:t>
             </a:r>
             <a:pPr algn="l" indent="0" marL="0">
               <a:buNone/>
@@ -10961,7 +10974,7 @@
                 <a:latin typeface="Calibri" pitchFamily="34" charset="0"/>
                 <a:cs typeface="Amiri" pitchFamily="2" charset="-78"/>
               </a:rPr>
-              <a:t> …</a:t>
+              <a:t> …‏</a:t>
             </a:r>
             <a:endParaRPr lang="en-US" sz="1150" dirty="0"/>
           </a:p>
@@ -11098,7 +11111,7 @@
                 <a:latin typeface="Calibri" pitchFamily="34" charset="0"/>
                 <a:cs typeface="Amiri" pitchFamily="2" charset="-78"/>
               </a:rPr>
-              <a:t>Add </a:t>
+              <a:t>Add ‏</a:t>
             </a:r>
             <a:pPr algn="l" indent="0" marL="0">
               <a:buNone/>
@@ -11125,7 +11138,7 @@
                 <a:latin typeface="Calibri" pitchFamily="34" charset="0"/>
                 <a:cs typeface="Amiri" pitchFamily="2" charset="-78"/>
               </a:rPr>
-              <a:t> … and a position (</a:t>
+              <a:t> …‏ and a position (‏</a:t>
             </a:r>
             <a:pPr algn="l" indent="0" marL="0">
               <a:buNone/>
@@ -11206,7 +11219,7 @@
                 <a:latin typeface="Calibri" pitchFamily="34" charset="0"/>
                 <a:cs typeface="Amiri" pitchFamily="2" charset="-78"/>
               </a:rPr>
-              <a:t>).</a:t>
+              <a:t>‏).</a:t>
             </a:r>
             <a:endParaRPr lang="en-US" sz="1150" dirty="0"/>
           </a:p>
@@ -17609,7 +17622,7 @@
                 <a:latin typeface="Calibri" pitchFamily="34" charset="0"/>
                 <a:cs typeface="Amiri" pitchFamily="2" charset="-78"/>
               </a:rPr>
-              <a:t>Feminine → </a:t>
+              <a:t>Feminine → ‏</a:t>
             </a:r>
             <a:pPr algn="l" indent="0" marL="0">
               <a:buNone/>
@@ -17636,7 +17649,7 @@
                 <a:latin typeface="Calibri" pitchFamily="34" charset="0"/>
                 <a:cs typeface="Amiri" pitchFamily="2" charset="-78"/>
               </a:rPr>
-              <a:t>.</a:t>
+              <a:t>‏.</a:t>
             </a:r>
             <a:endParaRPr lang="en-US" sz="1150" dirty="0"/>
           </a:p>
@@ -17847,7 +17860,7 @@
                 <a:latin typeface="Calibri" pitchFamily="34" charset="0"/>
                 <a:cs typeface="Amiri" pitchFamily="2" charset="-78"/>
               </a:rPr>
-              <a:t>Strength words go at the end; with </a:t>
+              <a:t>Strength words go at the end; with ‏</a:t>
             </a:r>
             <a:pPr algn="l" indent="0" marL="0">
               <a:buNone/>
@@ -17874,7 +17887,7 @@
                 <a:latin typeface="Calibri" pitchFamily="34" charset="0"/>
                 <a:cs typeface="Amiri" pitchFamily="2" charset="-78"/>
               </a:rPr>
-              <a:t> use </a:t>
+              <a:t>‏ use ‏</a:t>
             </a:r>
             <a:pPr algn="l" indent="0" marL="0">
               <a:buNone/>
@@ -17901,7 +17914,7 @@
                 <a:latin typeface="Calibri" pitchFamily="34" charset="0"/>
                 <a:cs typeface="Amiri" pitchFamily="2" charset="-78"/>
               </a:rPr>
-              <a:t>.</a:t>
+              <a:t>‏.</a:t>
             </a:r>
             <a:endParaRPr lang="en-US" sz="1150" dirty="0"/>
           </a:p>
@@ -18105,6 +18118,19 @@
               <a:buNone/>
             </a:pPr>
             <a:r>
+              <a:rPr lang="en-US" sz="1150" b="1" dirty="0">
+                <a:solidFill>
+                  <a:srgbClr val="1B3B6F"/>
+                </a:solidFill>
+                <a:latin typeface="Calibri" pitchFamily="34" charset="0"/>
+                <a:cs typeface="Amiri" pitchFamily="2" charset="-78"/>
+              </a:rPr>
+              <a:t>‏</a:t>
+            </a:r>
+            <a:pPr algn="l" indent="0" marL="0">
+              <a:buNone/>
+            </a:pPr>
+            <a:r>
               <a:rPr lang="ar-SA" altLang="en-US" sz="1500" b="1" dirty="0">
                 <a:solidFill>
                   <a:srgbClr val="1B3B6F"/>
@@ -18126,7 +18152,7 @@
                 <a:latin typeface="Calibri" pitchFamily="34" charset="0"/>
                 <a:cs typeface="Amiri" pitchFamily="2" charset="-78"/>
               </a:rPr>
-              <a:t> comes first: </a:t>
+              <a:t>‏ comes first: ‏</a:t>
             </a:r>
             <a:pPr algn="l" indent="0" marL="0">
               <a:buNone/>
@@ -18153,7 +18179,7 @@
                 <a:latin typeface="Calibri" pitchFamily="34" charset="0"/>
                 <a:cs typeface="Amiri" pitchFamily="2" charset="-78"/>
               </a:rPr>
-              <a:t>.</a:t>
+              <a:t>‏.</a:t>
             </a:r>
             <a:endParaRPr lang="en-US" sz="1150" dirty="0"/>
           </a:p>
@@ -20276,7 +20302,7 @@
                 <a:latin typeface="Calibri" pitchFamily="34" charset="0"/>
                 <a:cs typeface="Amiri" pitchFamily="2" charset="-78"/>
               </a:rPr>
-              <a:t>☐  At least one </a:t>
+              <a:t>☐  At least one ‏</a:t>
             </a:r>
             <a:pPr algn="l" indent="0" marL="0">
               <a:buNone/>
@@ -20303,7 +20329,7 @@
                 <a:latin typeface="Calibri" pitchFamily="34" charset="0"/>
                 <a:cs typeface="Amiri" pitchFamily="2" charset="-78"/>
               </a:rPr>
-              <a:t> and one </a:t>
+              <a:t>‏ and one ‏</a:t>
             </a:r>
             <a:pPr algn="l" indent="0" marL="0">
               <a:buNone/>
@@ -20330,7 +20356,7 @@
                 <a:latin typeface="Calibri" pitchFamily="34" charset="0"/>
                 <a:cs typeface="Amiri" pitchFamily="2" charset="-78"/>
               </a:rPr>
-              <a:t> (Develop).</a:t>
+              <a:t>‏ (Develop).</a:t>
             </a:r>
             <a:endParaRPr lang="en-US" sz="1200" dirty="0"/>
           </a:p>
@@ -23654,7 +23680,7 @@
                 <a:latin typeface="Calibri" pitchFamily="34" charset="0"/>
                 <a:cs typeface="Amiri" pitchFamily="2" charset="-78"/>
               </a:rPr>
-              <a:t>use </a:t>
+              <a:t>use ‏</a:t>
             </a:r>
             <a:pPr algn="l" indent="0" marL="0">
               <a:buNone/>
@@ -23681,7 +23707,7 @@
                 <a:latin typeface="Calibri" pitchFamily="34" charset="0"/>
                 <a:cs typeface="Amiri" pitchFamily="2" charset="-78"/>
               </a:rPr>
-              <a:t> correctly and </a:t>
+              <a:t>‏ correctly and ‏</a:t>
             </a:r>
             <a:pPr algn="l" indent="0" marL="0">
               <a:buNone/>
@@ -23708,7 +23734,7 @@
                 <a:latin typeface="Calibri" pitchFamily="34" charset="0"/>
                 <a:cs typeface="Amiri" pitchFamily="2" charset="-78"/>
               </a:rPr>
-              <a:t>?</a:t>
+              <a:t>‏?</a:t>
             </a:r>
             <a:endParaRPr lang="en-US" sz="1100" dirty="0"/>
           </a:p>
@@ -24091,7 +24117,7 @@
                 <a:latin typeface="Calibri" pitchFamily="34" charset="0"/>
                 <a:cs typeface="Amiri" pitchFamily="2" charset="-78"/>
               </a:rPr>
-              <a:t>use linking words (</a:t>
+              <a:t>use linking words (‏</a:t>
             </a:r>
             <a:pPr algn="l" indent="0" marL="0">
               <a:buNone/>
@@ -24199,7 +24225,7 @@
                 <a:latin typeface="Calibri" pitchFamily="34" charset="0"/>
                 <a:cs typeface="Amiri" pitchFamily="2" charset="-78"/>
               </a:rPr>
-              <a:t>)?</a:t>
+              <a:t>‏)?</a:t>
             </a:r>
             <a:endParaRPr lang="en-US" sz="1100" dirty="0"/>
           </a:p>
@@ -28145,7 +28171,7 @@
                 <a:latin typeface="Calibri" pitchFamily="34" charset="0"/>
                 <a:cs typeface="Amiri" pitchFamily="2" charset="-78"/>
               </a:rPr>
-              <a:t>I added reasons (</a:t>
+              <a:t>I added reasons (‏</a:t>
             </a:r>
             <a:pPr algn="l" indent="0" marL="0">
               <a:buNone/>
@@ -28172,7 +28198,7 @@
                 <a:latin typeface="Calibri" pitchFamily="34" charset="0"/>
                 <a:cs typeface="Amiri" pitchFamily="2" charset="-78"/>
               </a:rPr>
-              <a:t>) and extra details without frames.</a:t>
+              <a:t>‏) and extra details without frames.</a:t>
             </a:r>
             <a:endParaRPr lang="en-US" sz="1300" dirty="0"/>
           </a:p>
@@ -32300,7 +32326,7 @@
                 <a:latin typeface="Calibri" pitchFamily="34" charset="0"/>
                 <a:cs typeface="Amiri" pitchFamily="2" charset="-78"/>
               </a:rPr>
-              <a:t>☐  Add a reason (</a:t>
+              <a:t>☐  Add a reason (‏</a:t>
             </a:r>
             <a:pPr algn="l" indent="0" marL="0">
               <a:buNone/>
@@ -32327,7 +32353,7 @@
                 <a:latin typeface="Calibri" pitchFamily="34" charset="0"/>
                 <a:cs typeface="Amiri" pitchFamily="2" charset="-78"/>
               </a:rPr>
-              <a:t>) and an extra detail to every point.</a:t>
+              <a:t>‏) and an extra detail to every point.</a:t>
             </a:r>
             <a:endParaRPr lang="en-US" sz="1300" dirty="0"/>
           </a:p>
@@ -33848,7 +33874,7 @@
                 <a:latin typeface="Calibri" pitchFamily="34" charset="0"/>
                 <a:cs typeface="Amiri" pitchFamily="2" charset="-78"/>
               </a:rPr>
-              <a:t>Join a word from each lesson in one sentence with </a:t>
+              <a:t>Join a word from each lesson in one sentence with ‏</a:t>
             </a:r>
             <a:pPr algn="l" indent="0" marL="0">
               <a:buNone/>
@@ -33875,7 +33901,7 @@
                 <a:latin typeface="Calibri" pitchFamily="34" charset="0"/>
                 <a:cs typeface="Amiri" pitchFamily="2" charset="-78"/>
               </a:rPr>
-              <a:t> or </a:t>
+              <a:t>‏ or ‏</a:t>
             </a:r>
             <a:pPr algn="l" indent="0" marL="0">
               <a:buNone/>
@@ -33902,7 +33928,7 @@
                 <a:latin typeface="Calibri" pitchFamily="34" charset="0"/>
                 <a:cs typeface="Amiri" pitchFamily="2" charset="-78"/>
               </a:rPr>
-              <a:t>.</a:t>
+              <a:t>‏.</a:t>
             </a:r>
             <a:endParaRPr lang="en-US" sz="1150" dirty="0"/>
           </a:p>
